--- a/Baton_One_Pager.pptx
+++ b/Baton_One_Pager.pptx
@@ -6,7 +6,6 @@
   </p:sldMasterIdLst>
   <p:sldIdLst>
     <p:sldId id="256" r:id="rId7"/>
-    <p:sldId id="257" r:id="rId8"/>
   </p:sldIdLst>
   <p:sldSz cx="12191695" cy="6858000" type="screen4x3"/>
   <p:notesSz cx="6858000" cy="9144000"/>
@@ -3098,7 +3097,7 @@
         <p:spPr>
           <a:xfrm>
             <a:off x="0" y="0"/>
-            <a:ext cx="12191695" cy="1234440"/>
+            <a:ext cx="12191695" cy="868680"/>
           </a:xfrm>
           <a:prstGeom prst="rect">
             <a:avLst/>
@@ -3141,8 +3140,8 @@
         </p:nvSpPr>
         <p:spPr>
           <a:xfrm>
-            <a:off x="457200" y="182880"/>
-            <a:ext cx="7863840" cy="566928"/>
+            <a:off x="457200" y="118872"/>
+            <a:ext cx="7863840" cy="457200"/>
           </a:xfrm>
           <a:prstGeom prst="rect">
             <a:avLst/>
@@ -3161,7 +3160,7 @@
               </a:lnSpc>
             </a:pPr>
             <a:r>
-              <a:rPr sz="3400" b="1" i="0">
+              <a:rPr sz="2800" b="1" i="0">
                 <a:solidFill>
                   <a:srgbClr val="FFFFFF"/>
                 </a:solidFill>
@@ -3180,8 +3179,8 @@
         </p:nvSpPr>
         <p:spPr>
           <a:xfrm>
-            <a:off x="457200" y="749808"/>
-            <a:ext cx="7863840" cy="384048"/>
+            <a:off x="457200" y="566928"/>
+            <a:ext cx="7863840" cy="274320"/>
           </a:xfrm>
           <a:prstGeom prst="rect">
             <a:avLst/>
@@ -3200,7 +3199,7 @@
               </a:lnSpc>
             </a:pPr>
             <a:r>
-              <a:rPr sz="1500" b="0" i="1">
+              <a:rPr sz="1300" b="0" i="1">
                 <a:solidFill>
                   <a:srgbClr val="CADCFC"/>
                 </a:solidFill>
@@ -3219,8 +3218,8 @@
         </p:nvSpPr>
         <p:spPr>
           <a:xfrm>
-            <a:off x="9281160" y="329184"/>
-            <a:ext cx="2450592" cy="566928"/>
+            <a:off x="9464040" y="182880"/>
+            <a:ext cx="2267712" cy="512064"/>
           </a:xfrm>
           <a:prstGeom prst="roundRect">
             <a:avLst>
@@ -3255,7 +3254,7 @@
           <a:p>
             <a:pPr algn="ctr"/>
             <a:r>
-              <a:rPr sz="1100" b="1">
+              <a:rPr sz="1000" b="1">
                 <a:solidFill>
                   <a:srgbClr val="1B2340"/>
                 </a:solidFill>
@@ -3271,7 +3270,7 @@
               </a:spcBef>
             </a:pPr>
             <a:r>
-              <a:rPr sz="900" b="1">
+              <a:rPr sz="800" b="1">
                 <a:solidFill>
                   <a:srgbClr val="1B2340"/>
                 </a:solidFill>
@@ -3290,8 +3289,8 @@
         </p:nvSpPr>
         <p:spPr>
           <a:xfrm>
-            <a:off x="457200" y="1508760"/>
-            <a:ext cx="3566160" cy="4434840"/>
+            <a:off x="457200" y="1005840"/>
+            <a:ext cx="3566160" cy="3703320"/>
           </a:xfrm>
           <a:prstGeom prst="roundRect">
             <a:avLst>
@@ -3336,8 +3335,8 @@
         </p:nvSpPr>
         <p:spPr>
           <a:xfrm>
-            <a:off x="731520" y="1783080"/>
-            <a:ext cx="548640" cy="548640"/>
+            <a:off x="694944" y="1243584"/>
+            <a:ext cx="475488" cy="475488"/>
           </a:xfrm>
           <a:prstGeom prst="ellipse">
             <a:avLst/>
@@ -3370,7 +3369,7 @@
           <a:p>
             <a:pPr algn="ctr"/>
             <a:r>
-              <a:rPr sz="2200" b="1">
+              <a:rPr sz="1900" b="1">
                 <a:solidFill>
                   <a:srgbClr val="FFFFFF"/>
                 </a:solidFill>
@@ -3389,8 +3388,8 @@
         </p:nvSpPr>
         <p:spPr>
           <a:xfrm>
-            <a:off x="1417320" y="1783080"/>
-            <a:ext cx="2331720" cy="548640"/>
+            <a:off x="1298448" y="1243584"/>
+            <a:ext cx="2468880" cy="475488"/>
           </a:xfrm>
           <a:prstGeom prst="rect">
             <a:avLst/>
@@ -3409,7 +3408,7 @@
               </a:lnSpc>
             </a:pPr>
             <a:r>
-              <a:rPr sz="1900" b="1" i="0">
+              <a:rPr sz="1650" b="1" i="0">
                 <a:solidFill>
                   <a:srgbClr val="1B2340"/>
                 </a:solidFill>
@@ -3428,8 +3427,8 @@
         </p:nvSpPr>
         <p:spPr>
           <a:xfrm>
-            <a:off x="4297680" y="1508760"/>
-            <a:ext cx="3566160" cy="4434840"/>
+            <a:off x="4297680" y="1005840"/>
+            <a:ext cx="3566160" cy="3703320"/>
           </a:xfrm>
           <a:prstGeom prst="roundRect">
             <a:avLst>
@@ -3474,8 +3473,8 @@
         </p:nvSpPr>
         <p:spPr>
           <a:xfrm>
-            <a:off x="4572000" y="1783080"/>
-            <a:ext cx="548640" cy="548640"/>
+            <a:off x="4535424" y="1243584"/>
+            <a:ext cx="475488" cy="475488"/>
           </a:xfrm>
           <a:prstGeom prst="ellipse">
             <a:avLst/>
@@ -3508,7 +3507,7 @@
           <a:p>
             <a:pPr algn="ctr"/>
             <a:r>
-              <a:rPr sz="2200" b="1">
+              <a:rPr sz="1900" b="1">
                 <a:solidFill>
                   <a:srgbClr val="FFFFFF"/>
                 </a:solidFill>
@@ -3527,8 +3526,8 @@
         </p:nvSpPr>
         <p:spPr>
           <a:xfrm>
-            <a:off x="5257800" y="1783080"/>
-            <a:ext cx="2331720" cy="548640"/>
+            <a:off x="5138928" y="1243584"/>
+            <a:ext cx="2468880" cy="475488"/>
           </a:xfrm>
           <a:prstGeom prst="rect">
             <a:avLst/>
@@ -3547,7 +3546,7 @@
               </a:lnSpc>
             </a:pPr>
             <a:r>
-              <a:rPr sz="1900" b="1" i="0">
+              <a:rPr sz="1650" b="1" i="0">
                 <a:solidFill>
                   <a:srgbClr val="1B2340"/>
                 </a:solidFill>
@@ -3566,8 +3565,8 @@
         </p:nvSpPr>
         <p:spPr>
           <a:xfrm>
-            <a:off x="8138160" y="1508760"/>
-            <a:ext cx="3566160" cy="4434840"/>
+            <a:off x="8138160" y="1005840"/>
+            <a:ext cx="3566160" cy="3703320"/>
           </a:xfrm>
           <a:prstGeom prst="roundRect">
             <a:avLst>
@@ -3612,8 +3611,8 @@
         </p:nvSpPr>
         <p:spPr>
           <a:xfrm>
-            <a:off x="8412480" y="1783080"/>
-            <a:ext cx="548640" cy="548640"/>
+            <a:off x="8375904" y="1243584"/>
+            <a:ext cx="475488" cy="475488"/>
           </a:xfrm>
           <a:prstGeom prst="ellipse">
             <a:avLst/>
@@ -3646,7 +3645,7 @@
           <a:p>
             <a:pPr algn="ctr"/>
             <a:r>
-              <a:rPr sz="2200" b="1">
+              <a:rPr sz="1900" b="1">
                 <a:solidFill>
                   <a:srgbClr val="FFFFFF"/>
                 </a:solidFill>
@@ -3665,8 +3664,8 @@
         </p:nvSpPr>
         <p:spPr>
           <a:xfrm>
-            <a:off x="9098280" y="1783080"/>
-            <a:ext cx="2331720" cy="548640"/>
+            <a:off x="8979408" y="1243584"/>
+            <a:ext cx="2468880" cy="475488"/>
           </a:xfrm>
           <a:prstGeom prst="rect">
             <a:avLst/>
@@ -3685,7 +3684,7 @@
               </a:lnSpc>
             </a:pPr>
             <a:r>
-              <a:rPr sz="1900" b="1" i="0">
+              <a:rPr sz="1650" b="1" i="0">
                 <a:solidFill>
                   <a:srgbClr val="1B2340"/>
                 </a:solidFill>
@@ -3704,8 +3703,8 @@
         </p:nvSpPr>
         <p:spPr>
           <a:xfrm>
-            <a:off x="731520" y="2560320"/>
-            <a:ext cx="3017520" cy="3108959"/>
+            <a:off x="713232" y="1901952"/>
+            <a:ext cx="3054096" cy="2606039"/>
           </a:xfrm>
           <a:prstGeom prst="rect">
             <a:avLst/>
@@ -3720,14 +3719,14 @@
           <a:p>
             <a:pPr algn="l">
               <a:lnSpc>
-                <a:spcPct val="108000"/>
+                <a:spcPct val="104000"/>
               </a:lnSpc>
               <a:spcAft>
-                <a:spcPts val="600"/>
+                <a:spcPts val="500"/>
               </a:spcAft>
             </a:pPr>
             <a:r>
-              <a:rPr sz="1200" b="1">
+              <a:rPr sz="1100" b="1">
                 <a:solidFill>
                   <a:srgbClr val="F2A93B"/>
                 </a:solidFill>
@@ -3736,26 +3735,26 @@
               <a:t>●  </a:t>
             </a:r>
             <a:r>
-              <a:rPr sz="1400">
+              <a:rPr sz="1300">
                 <a:solidFill>
                   <a:srgbClr val="1B2340"/>
                 </a:solidFill>
                 <a:latin typeface="Calibri"/>
               </a:rPr>
-              <a:t>KT is a meeting and a checklist: the giver believes they explained, the taker believes they understood</a:t>
+              <a:t>KT is a meeting and a checklist: nobody tests whether the giver and taker actually agree</a:t>
             </a:r>
           </a:p>
           <a:p>
             <a:pPr algn="l">
               <a:lnSpc>
-                <a:spcPct val="108000"/>
+                <a:spcPct val="104000"/>
               </a:lnSpc>
               <a:spcAft>
-                <a:spcPts val="600"/>
+                <a:spcPts val="500"/>
               </a:spcAft>
             </a:pPr>
             <a:r>
-              <a:rPr sz="1200" b="1">
+              <a:rPr sz="1100" b="1">
                 <a:solidFill>
                   <a:srgbClr val="F2A93B"/>
                 </a:solidFill>
@@ -3764,26 +3763,26 @@
               <a:t>●  </a:t>
             </a:r>
             <a:r>
-              <a:rPr sz="1400">
+              <a:rPr sz="1300">
                 <a:solidFill>
                   <a:srgbClr val="1B2340"/>
                 </a:solidFill>
                 <a:latin typeface="Calibri"/>
               </a:rPr>
-              <a:t>Nobody tests whether the two accounts match</a:t>
+              <a:t>Gaps surface months later as incidents and slow ramp-up</a:t>
             </a:r>
           </a:p>
           <a:p>
             <a:pPr algn="l">
               <a:lnSpc>
-                <a:spcPct val="108000"/>
+                <a:spcPct val="104000"/>
               </a:lnSpc>
               <a:spcAft>
-                <a:spcPts val="600"/>
+                <a:spcPts val="500"/>
               </a:spcAft>
             </a:pPr>
             <a:r>
-              <a:rPr sz="1200" b="1">
+              <a:rPr sz="1100" b="1">
                 <a:solidFill>
                   <a:srgbClr val="F2A93B"/>
                 </a:solidFill>
@@ -3792,41 +3791,13 @@
               <a:t>●  </a:t>
             </a:r>
             <a:r>
-              <a:rPr sz="1400">
+              <a:rPr sz="1300">
                 <a:solidFill>
                   <a:srgbClr val="1B2340"/>
                 </a:solidFill>
                 <a:latin typeface="Calibri"/>
               </a:rPr>
-              <a:t>Gaps surface months later as incidents and slow ramp-up</a:t>
-            </a:r>
-          </a:p>
-          <a:p>
-            <a:pPr algn="l">
-              <a:lnSpc>
-                <a:spcPct val="108000"/>
-              </a:lnSpc>
-              <a:spcAft>
-                <a:spcPts val="600"/>
-              </a:spcAft>
-            </a:pPr>
-            <a:r>
-              <a:rPr sz="1200" b="1">
-                <a:solidFill>
-                  <a:srgbClr val="F2A93B"/>
-                </a:solidFill>
-                <a:latin typeface="Calibri"/>
-              </a:rPr>
-              <a:t>●  </a:t>
-            </a:r>
-            <a:r>
-              <a:rPr sz="1400">
-                <a:solidFill>
-                  <a:srgbClr val="1B2340"/>
-                </a:solidFill>
-                <a:latin typeface="Calibri"/>
-              </a:rPr>
-              <a:t>Project managers cannot see KT status, blockers or who is holding it up</a:t>
+              <a:t>Project managers can't see KT status, blockers, or who is holding it up</a:t>
             </a:r>
           </a:p>
         </p:txBody>
@@ -3839,8 +3810,8 @@
         </p:nvSpPr>
         <p:spPr>
           <a:xfrm>
-            <a:off x="4572000" y="2560320"/>
-            <a:ext cx="3017520" cy="3108959"/>
+            <a:off x="4553712" y="1901952"/>
+            <a:ext cx="3054096" cy="2606039"/>
           </a:xfrm>
           <a:prstGeom prst="rect">
             <a:avLst/>
@@ -3855,14 +3826,14 @@
           <a:p>
             <a:pPr algn="l">
               <a:lnSpc>
-                <a:spcPct val="108000"/>
+                <a:spcPct val="104000"/>
               </a:lnSpc>
               <a:spcAft>
-                <a:spcPts val="600"/>
+                <a:spcPts val="500"/>
               </a:spcAft>
             </a:pPr>
             <a:r>
-              <a:rPr sz="1150" b="1">
+              <a:rPr sz="1050" b="1">
                 <a:solidFill>
                   <a:srgbClr val="F2A93B"/>
                 </a:solidFill>
@@ -3871,26 +3842,26 @@
               <a:t>●  </a:t>
             </a:r>
             <a:r>
-              <a:rPr sz="1350">
+              <a:rPr sz="1250">
                 <a:solidFill>
                   <a:srgbClr val="1B2340"/>
                 </a:solidFill>
                 <a:latin typeface="Calibri"/>
               </a:rPr>
-              <a:t>PM enters project, roles, stack, dev/test environments and duration</a:t>
+              <a:t>AI asks giver and taker separately; round 2 follows up on weak angles only</a:t>
             </a:r>
           </a:p>
           <a:p>
             <a:pPr algn="l">
               <a:lnSpc>
-                <a:spcPct val="108000"/>
+                <a:spcPct val="104000"/>
               </a:lnSpc>
               <a:spcAft>
-                <a:spcPts val="600"/>
+                <a:spcPts val="500"/>
               </a:spcAft>
             </a:pPr>
             <a:r>
-              <a:rPr sz="1150" b="1">
+              <a:rPr sz="1050" b="1">
                 <a:solidFill>
                   <a:srgbClr val="F2A93B"/>
                 </a:solidFill>
@@ -3899,26 +3870,26 @@
               <a:t>●  </a:t>
             </a:r>
             <a:r>
-              <a:rPr sz="1350">
+              <a:rPr sz="1250">
                 <a:solidFill>
                   <a:srgbClr val="1B2340"/>
                 </a:solidFill>
                 <a:latin typeface="Calibri"/>
               </a:rPr>
-              <a:t>AI writes tailored questions across 12 KT angles, separately for giver and taker</a:t>
+              <a:t>Code verifies quotes and scores readiness against the manager's target</a:t>
             </a:r>
           </a:p>
           <a:p>
             <a:pPr algn="l">
               <a:lnSpc>
-                <a:spcPct val="108000"/>
+                <a:spcPct val="104000"/>
               </a:lnSpc>
               <a:spcAft>
-                <a:spcPts val="600"/>
+                <a:spcPts val="500"/>
               </a:spcAft>
             </a:pPr>
             <a:r>
-              <a:rPr sz="1150" b="1">
+              <a:rPr sz="1050" b="1">
                 <a:solidFill>
                   <a:srgbClr val="F2A93B"/>
                 </a:solidFill>
@@ -3927,26 +3898,26 @@
               <a:t>●  </a:t>
             </a:r>
             <a:r>
-              <a:rPr sz="1350">
+              <a:rPr sz="1250">
                 <a:solidFill>
                   <a:srgbClr val="1B2340"/>
                 </a:solidFill>
                 <a:latin typeface="Calibri"/>
               </a:rPr>
-              <a:t>Answers are recorded independently, then compared for gaps and mismatches</a:t>
+              <a:t>AI recommends and reviews action items; code decides close / redress / escalate</a:t>
             </a:r>
           </a:p>
           <a:p>
             <a:pPr algn="l">
               <a:lnSpc>
-                <a:spcPct val="108000"/>
+                <a:spcPct val="104000"/>
               </a:lnSpc>
               <a:spcAft>
-                <a:spcPts val="600"/>
+                <a:spcPts val="500"/>
               </a:spcAft>
             </a:pPr>
             <a:r>
-              <a:rPr sz="1150" b="1">
+              <a:rPr sz="1050" b="1">
                 <a:solidFill>
                   <a:srgbClr val="F2A93B"/>
                 </a:solidFill>
@@ -3955,41 +3926,13 @@
               <a:t>●  </a:t>
             </a:r>
             <a:r>
-              <a:rPr sz="1350">
+              <a:rPr sz="1250">
                 <a:solidFill>
                   <a:srgbClr val="1B2340"/>
                 </a:solidFill>
                 <a:latin typeface="Calibri"/>
               </a:rPr>
-              <a:t>Gaps become action items for giver or taker; their responses are reviewed</a:t>
-            </a:r>
-          </a:p>
-          <a:p>
-            <a:pPr algn="l">
-              <a:lnSpc>
-                <a:spcPct val="108000"/>
-              </a:lnSpc>
-              <a:spcAft>
-                <a:spcPts val="600"/>
-              </a:spcAft>
-            </a:pPr>
-            <a:r>
-              <a:rPr sz="1150" b="1">
-                <a:solidFill>
-                  <a:srgbClr val="F2A93B"/>
-                </a:solidFill>
-                <a:latin typeface="Calibri"/>
-              </a:rPr>
-              <a:t>●  </a:t>
-            </a:r>
-            <a:r>
-              <a:rPr sz="1350">
-                <a:solidFill>
-                  <a:srgbClr val="1B2340"/>
-                </a:solidFill>
-                <a:latin typeface="Calibri"/>
-              </a:rPr>
-              <a:t>Code decides: close, keep open for redress, or escalate</a:t>
+              <a:t>Full audit trail: every question, answer, action and decision is logged</a:t>
             </a:r>
           </a:p>
         </p:txBody>
@@ -4002,8 +3945,8 @@
         </p:nvSpPr>
         <p:spPr>
           <a:xfrm>
-            <a:off x="8412480" y="2560320"/>
-            <a:ext cx="914400" cy="502920"/>
+            <a:off x="8394192" y="1901952"/>
+            <a:ext cx="944879" cy="420624"/>
           </a:xfrm>
           <a:prstGeom prst="rect">
             <a:avLst/>
@@ -4022,7 +3965,7 @@
               </a:lnSpc>
             </a:pPr>
             <a:r>
-              <a:rPr sz="2600" b="1" i="0">
+              <a:rPr sz="2100" b="1" i="0">
                 <a:solidFill>
                   <a:srgbClr val="F2A93B"/>
                 </a:solidFill>
@@ -4041,8 +3984,8 @@
         </p:nvSpPr>
         <p:spPr>
           <a:xfrm>
-            <a:off x="8412480" y="3063239"/>
-            <a:ext cx="914400" cy="457200"/>
+            <a:off x="8394192" y="2322576"/>
+            <a:ext cx="944879" cy="384048"/>
           </a:xfrm>
           <a:prstGeom prst="rect">
             <a:avLst/>
@@ -4061,7 +4004,7 @@
               </a:lnSpc>
             </a:pPr>
             <a:r>
-              <a:rPr sz="950" b="0" i="0">
+              <a:rPr sz="850" b="0" i="0">
                 <a:solidFill>
                   <a:srgbClr val="555F75"/>
                 </a:solidFill>
@@ -4077,7 +4020,7 @@
               </a:lnSpc>
             </a:pPr>
             <a:r>
-              <a:rPr sz="950" b="0" i="0">
+              <a:rPr sz="850" b="0" i="0">
                 <a:solidFill>
                   <a:srgbClr val="555F75"/>
                 </a:solidFill>
@@ -4096,8 +4039,8 @@
         </p:nvSpPr>
         <p:spPr>
           <a:xfrm>
-            <a:off x="9464040" y="2560320"/>
-            <a:ext cx="914400" cy="502920"/>
+            <a:off x="9448799" y="1901952"/>
+            <a:ext cx="944879" cy="420624"/>
           </a:xfrm>
           <a:prstGeom prst="rect">
             <a:avLst/>
@@ -4116,7 +4059,7 @@
               </a:lnSpc>
             </a:pPr>
             <a:r>
-              <a:rPr sz="2600" b="1" i="0">
+              <a:rPr sz="2100" b="1" i="0">
                 <a:solidFill>
                   <a:srgbClr val="F2A93B"/>
                 </a:solidFill>
@@ -4135,8 +4078,8 @@
         </p:nvSpPr>
         <p:spPr>
           <a:xfrm>
-            <a:off x="9464040" y="3063239"/>
-            <a:ext cx="914400" cy="457200"/>
+            <a:off x="9448799" y="2322576"/>
+            <a:ext cx="944879" cy="384048"/>
           </a:xfrm>
           <a:prstGeom prst="rect">
             <a:avLst/>
@@ -4155,7 +4098,7 @@
               </a:lnSpc>
             </a:pPr>
             <a:r>
-              <a:rPr sz="950" b="0" i="0">
+              <a:rPr sz="850" b="0" i="0">
                 <a:solidFill>
                   <a:srgbClr val="555F75"/>
                 </a:solidFill>
@@ -4171,7 +4114,7 @@
               </a:lnSpc>
             </a:pPr>
             <a:r>
-              <a:rPr sz="950" b="0" i="0">
+              <a:rPr sz="850" b="0" i="0">
                 <a:solidFill>
                   <a:srgbClr val="555F75"/>
                 </a:solidFill>
@@ -4190,8 +4133,8 @@
         </p:nvSpPr>
         <p:spPr>
           <a:xfrm>
-            <a:off x="10515600" y="2560320"/>
-            <a:ext cx="914400" cy="502920"/>
+            <a:off x="10503408" y="1901952"/>
+            <a:ext cx="944879" cy="420624"/>
           </a:xfrm>
           <a:prstGeom prst="rect">
             <a:avLst/>
@@ -4210,7 +4153,7 @@
               </a:lnSpc>
             </a:pPr>
             <a:r>
-              <a:rPr sz="2600" b="1" i="0">
+              <a:rPr sz="2100" b="1" i="0">
                 <a:solidFill>
                   <a:srgbClr val="F2A93B"/>
                 </a:solidFill>
@@ -4229,8 +4172,8 @@
         </p:nvSpPr>
         <p:spPr>
           <a:xfrm>
-            <a:off x="10515600" y="3063239"/>
-            <a:ext cx="914400" cy="457200"/>
+            <a:off x="10503408" y="2322576"/>
+            <a:ext cx="944879" cy="384048"/>
           </a:xfrm>
           <a:prstGeom prst="rect">
             <a:avLst/>
@@ -4249,7 +4192,7 @@
               </a:lnSpc>
             </a:pPr>
             <a:r>
-              <a:rPr sz="950" b="0" i="0">
+              <a:rPr sz="850" b="0" i="0">
                 <a:solidFill>
                   <a:srgbClr val="555F75"/>
                 </a:solidFill>
@@ -4265,7 +4208,7 @@
               </a:lnSpc>
             </a:pPr>
             <a:r>
-              <a:rPr sz="950" b="0" i="0">
+              <a:rPr sz="850" b="0" i="0">
                 <a:solidFill>
                   <a:srgbClr val="555F75"/>
                 </a:solidFill>
@@ -4284,8 +4227,8 @@
         </p:nvSpPr>
         <p:spPr>
           <a:xfrm>
-            <a:off x="8412480" y="3703320"/>
-            <a:ext cx="3017520" cy="1965960"/>
+            <a:off x="8394192" y="2834640"/>
+            <a:ext cx="3054096" cy="1737360"/>
           </a:xfrm>
           <a:prstGeom prst="rect">
             <a:avLst/>
@@ -4300,14 +4243,14 @@
           <a:p>
             <a:pPr algn="l">
               <a:lnSpc>
-                <a:spcPct val="108000"/>
+                <a:spcPct val="104000"/>
               </a:lnSpc>
               <a:spcAft>
-                <a:spcPts val="600"/>
+                <a:spcPts val="500"/>
               </a:spcAft>
             </a:pPr>
             <a:r>
-              <a:rPr sz="1200" b="1">
+              <a:rPr sz="1100" b="1">
                 <a:solidFill>
                   <a:srgbClr val="F2A93B"/>
                 </a:solidFill>
@@ -4316,7 +4259,7 @@
               <a:t>●  </a:t>
             </a:r>
             <a:r>
-              <a:rPr sz="1400">
+              <a:rPr sz="1300">
                 <a:solidFill>
                   <a:srgbClr val="1B2340"/>
                 </a:solidFill>
@@ -4328,14 +4271,14 @@
           <a:p>
             <a:pPr algn="l">
               <a:lnSpc>
-                <a:spcPct val="108000"/>
+                <a:spcPct val="104000"/>
               </a:lnSpc>
               <a:spcAft>
-                <a:spcPts val="600"/>
+                <a:spcPts val="500"/>
               </a:spcAft>
             </a:pPr>
             <a:r>
-              <a:rPr sz="1200" b="1">
+              <a:rPr sz="1100" b="1">
                 <a:solidFill>
                   <a:srgbClr val="F2A93B"/>
                 </a:solidFill>
@@ -4344,7 +4287,7 @@
               <a:t>●  </a:t>
             </a:r>
             <a:r>
-              <a:rPr sz="1400">
+              <a:rPr sz="1300">
                 <a:solidFill>
                   <a:srgbClr val="1B2340"/>
                 </a:solidFill>
@@ -4356,14 +4299,14 @@
           <a:p>
             <a:pPr algn="l">
               <a:lnSpc>
-                <a:spcPct val="108000"/>
+                <a:spcPct val="104000"/>
               </a:lnSpc>
               <a:spcAft>
-                <a:spcPts val="600"/>
+                <a:spcPts val="500"/>
               </a:spcAft>
             </a:pPr>
             <a:r>
-              <a:rPr sz="1200" b="1">
+              <a:rPr sz="1100" b="1">
                 <a:solidFill>
                   <a:srgbClr val="F2A93B"/>
                 </a:solidFill>
@@ -4372,84 +4315,73 @@
               <a:t>●  </a:t>
             </a:r>
             <a:r>
-              <a:rPr sz="1400">
+              <a:rPr sz="1300">
                 <a:solidFill>
                   <a:srgbClr val="1B2340"/>
                 </a:solidFill>
                 <a:latin typeface="Calibri"/>
               </a:rPr>
-              <a:t>Full audit trail of questions, answers, actions and the decision</a:t>
-            </a:r>
-          </a:p>
-        </p:txBody>
-      </p:sp>
-      <p:sp>
-        <p:nvSpPr>
-          <p:cNvPr id="24" name="TextBox 23"/>
-          <p:cNvSpPr txBox="1"/>
-          <p:nvPr/>
-        </p:nvSpPr>
-        <p:spPr>
-          <a:xfrm>
-            <a:off x="457200" y="6263640"/>
-            <a:ext cx="11277295" cy="365760"/>
-          </a:xfrm>
-          <a:prstGeom prst="rect">
-            <a:avLst/>
-          </a:prstGeom>
-          <a:noFill/>
-        </p:spPr>
-        <p:txBody>
-          <a:bodyPr wrap="square" anchor="t" lIns="0" rIns="0" tIns="0" bIns="0">
-            <a:spAutoFit/>
-          </a:bodyPr>
-          <a:lstStyle/>
-          <a:p>
-            <a:pPr algn="ctr">
-              <a:lnSpc>
-                <a:spcPct val="100000"/>
-              </a:lnSpc>
-            </a:pPr>
-            <a:r>
-              <a:rPr sz="1050" b="0" i="1">
-                <a:solidFill>
-                  <a:srgbClr val="555F75"/>
-                </a:solidFill>
-                <a:latin typeface="Calibri"/>
-              </a:rPr>
-              <a:t>Stack: Python · Streamlit · Google Gemini (structured output) · simulated giver and taker personas, one run, synthetic project · no GPU needed</a:t>
-            </a:r>
-          </a:p>
-        </p:txBody>
-      </p:sp>
-    </p:spTree>
-  </p:cSld>
-  <p:clrMapOvr>
-    <a:masterClrMapping/>
-  </p:clrMapOvr>
-</p:sld>
-</file>
-
-<file path=ppt/slides/slide2.xml><?xml version="1.0" encoding="utf-8"?>
-<p:sld xmlns:a="http://schemas.openxmlformats.org/drawingml/2006/main" xmlns:p="http://schemas.openxmlformats.org/presentationml/2006/main" xmlns:r="http://schemas.openxmlformats.org/officeDocument/2006/relationships">
-  <p:cSld>
-    <p:spTree>
-      <p:nvGrpSpPr>
-        <p:cNvPr id="1" name=""/>
-        <p:cNvGrpSpPr/>
-        <p:nvPr/>
-      </p:nvGrpSpPr>
-      <p:grpSpPr/>
-      <p:sp>
-        <p:nvSpPr>
-          <p:cNvPr id="2" name="Rectangle 1"/>
+              <a:t>Turns a KT into an auditable, escalation-ready workflow</a:t>
+            </a:r>
+          </a:p>
+        </p:txBody>
+      </p:sp>
+      <p:sp>
+        <p:nvSpPr>
+          <p:cNvPr id="24" name="Rounded Rectangle 23"/>
           <p:cNvSpPr/>
           <p:nvPr/>
         </p:nvSpPr>
         <p:spPr>
           <a:xfrm>
-            <a:off x="0" y="0"/>
-            <a:ext cx="12191695" cy="914400"/>
+            <a:off x="457200" y="4828032"/>
+            <a:ext cx="1780489" cy="914400"/>
+          </a:xfrm>
+          <a:prstGeom prst="roundRect">
+            <a:avLst>
+              <a:gd name="adj" fmla="val 6000"/>
+            </a:avLst>
+          </a:prstGeom>
+          <a:solidFill>
+            <a:srgbClr val="EDF1F8"/>
+          </a:solidFill>
+          <a:ln>
+            <a:noFill/>
+          </a:ln>
+          <a:effectLst/>
+        </p:spPr>
+        <p:style>
+          <a:lnRef idx="1">
+            <a:schemeClr val="accent1"/>
+          </a:lnRef>
+          <a:fillRef idx="3">
+            <a:schemeClr val="accent1"/>
+          </a:fillRef>
+          <a:effectRef idx="2">
+            <a:schemeClr val="accent1"/>
+          </a:effectRef>
+          <a:fontRef idx="minor">
+            <a:schemeClr val="lt1"/>
+          </a:fontRef>
+        </p:style>
+        <p:txBody>
+          <a:bodyPr rtlCol="0" anchor="ctr"/>
+          <a:lstStyle/>
+          <a:p>
+            <a:pPr algn="ctr"/>
+          </a:p>
+        </p:txBody>
+      </p:sp>
+      <p:sp>
+        <p:nvSpPr>
+          <p:cNvPr id="25" name="Rectangle 24"/>
+          <p:cNvSpPr/>
+          <p:nvPr/>
+        </p:nvSpPr>
+        <p:spPr>
+          <a:xfrm>
+            <a:off x="457200" y="4828032"/>
+            <a:ext cx="1780489" cy="292608"/>
           </a:xfrm>
           <a:prstGeom prst="rect">
             <a:avLst/>
@@ -4486,14 +4418,14 @@
       </p:sp>
       <p:sp>
         <p:nvSpPr>
-          <p:cNvPr id="3" name="TextBox 2"/>
+          <p:cNvPr id="26" name="TextBox 25"/>
           <p:cNvSpPr txBox="1"/>
           <p:nvPr/>
         </p:nvSpPr>
         <p:spPr>
           <a:xfrm>
-            <a:off x="457200" y="109728"/>
-            <a:ext cx="11247120" cy="457200"/>
+            <a:off x="548640" y="4846320"/>
+            <a:ext cx="1634185" cy="256032"/>
           </a:xfrm>
           <a:prstGeom prst="rect">
             <a:avLst/>
@@ -4501,7 +4433,7 @@
           <a:noFill/>
         </p:spPr>
         <p:txBody>
-          <a:bodyPr wrap="square" anchor="t" lIns="0" rIns="0" tIns="0" bIns="0">
+          <a:bodyPr wrap="square" anchor="ctr" lIns="0" rIns="0" tIns="0" bIns="0">
             <a:spAutoFit/>
           </a:bodyPr>
           <a:lstStyle/>
@@ -4512,27 +4444,27 @@
               </a:lnSpc>
             </a:pPr>
             <a:r>
-              <a:rPr sz="2600" b="1" i="0">
+              <a:rPr sz="1150" b="1" i="0">
                 <a:solidFill>
                   <a:srgbClr val="FFFFFF"/>
                 </a:solidFill>
-                <a:latin typeface="Cambria"/>
+                <a:latin typeface="Calibri"/>
               </a:rPr>
-              <a:t>Baton workflow: from project brief to a closed, evidenced KT</a:t>
-            </a:r>
-          </a:p>
-        </p:txBody>
-      </p:sp>
-      <p:sp>
-        <p:nvSpPr>
-          <p:cNvPr id="4" name="TextBox 3"/>
+              <a:t>1 Brief</a:t>
+            </a:r>
+          </a:p>
+        </p:txBody>
+      </p:sp>
+      <p:sp>
+        <p:nvSpPr>
+          <p:cNvPr id="27" name="TextBox 26"/>
           <p:cNvSpPr txBox="1"/>
           <p:nvPr/>
         </p:nvSpPr>
         <p:spPr>
           <a:xfrm>
-            <a:off x="457200" y="576072"/>
-            <a:ext cx="11247120" cy="274320"/>
+            <a:off x="548640" y="5175504"/>
+            <a:ext cx="1597609" cy="530352"/>
           </a:xfrm>
           <a:prstGeom prst="rect">
             <a:avLst/>
@@ -4547,35 +4479,35 @@
           <a:p>
             <a:pPr algn="l">
               <a:lnSpc>
-                <a:spcPct val="100000"/>
+                <a:spcPct val="105000"/>
               </a:lnSpc>
             </a:pPr>
             <a:r>
-              <a:rPr sz="1300" b="0" i="1">
-                <a:solidFill>
-                  <a:srgbClr val="CADCFC"/>
+              <a:rPr sz="900" b="0" i="0">
+                <a:solidFill>
+                  <a:srgbClr val="1B2340"/>
                 </a:solidFill>
                 <a:latin typeface="Calibri"/>
               </a:rPr>
-              <a:t>Independent giver and taker Q&amp;A, gap assessment, action items, review, and a decision the manager can track</a:t>
-            </a:r>
-          </a:p>
-        </p:txBody>
-      </p:sp>
-      <p:sp>
-        <p:nvSpPr>
-          <p:cNvPr id="5" name="Rounded Rectangle 4"/>
+              <a:t>PM enters project, roles, stack, dev/test env, duration</a:t>
+            </a:r>
+          </a:p>
+        </p:txBody>
+      </p:sp>
+      <p:sp>
+        <p:nvSpPr>
+          <p:cNvPr id="28" name="Rounded Rectangle 27"/>
           <p:cNvSpPr/>
           <p:nvPr/>
         </p:nvSpPr>
         <p:spPr>
           <a:xfrm>
-            <a:off x="457200" y="1115568"/>
-            <a:ext cx="1772869" cy="1874519"/>
+            <a:off x="2356561" y="4828032"/>
+            <a:ext cx="1780489" cy="914400"/>
           </a:xfrm>
           <a:prstGeom prst="roundRect">
             <a:avLst>
-              <a:gd name="adj" fmla="val 5000"/>
+              <a:gd name="adj" fmla="val 6000"/>
             </a:avLst>
           </a:prstGeom>
           <a:solidFill>
@@ -4610,14 +4542,14 @@
       </p:sp>
       <p:sp>
         <p:nvSpPr>
-          <p:cNvPr id="6" name="Rectangle 5"/>
+          <p:cNvPr id="29" name="Rectangle 28"/>
           <p:cNvSpPr/>
           <p:nvPr/>
         </p:nvSpPr>
         <p:spPr>
           <a:xfrm>
-            <a:off x="457200" y="1115568"/>
-            <a:ext cx="1772869" cy="384048"/>
+            <a:off x="2356561" y="4828032"/>
+            <a:ext cx="1780489" cy="292608"/>
           </a:xfrm>
           <a:prstGeom prst="rect">
             <a:avLst/>
@@ -4654,14 +4586,14 @@
       </p:sp>
       <p:sp>
         <p:nvSpPr>
-          <p:cNvPr id="7" name="TextBox 6"/>
+          <p:cNvPr id="30" name="TextBox 29"/>
           <p:cNvSpPr txBox="1"/>
           <p:nvPr/>
         </p:nvSpPr>
         <p:spPr>
           <a:xfrm>
-            <a:off x="566928" y="1152144"/>
-            <a:ext cx="1589989" cy="310896"/>
+            <a:off x="2448001" y="4846320"/>
+            <a:ext cx="1634185" cy="256032"/>
           </a:xfrm>
           <a:prstGeom prst="rect">
             <a:avLst/>
@@ -4680,27 +4612,27 @@
               </a:lnSpc>
             </a:pPr>
             <a:r>
-              <a:rPr sz="1300" b="1" i="0">
+              <a:rPr sz="1150" b="1" i="0">
                 <a:solidFill>
                   <a:srgbClr val="FFFFFF"/>
                 </a:solidFill>
                 <a:latin typeface="Calibri"/>
               </a:rPr>
-              <a:t>1 Brief</a:t>
-            </a:r>
-          </a:p>
-        </p:txBody>
-      </p:sp>
-      <p:sp>
-        <p:nvSpPr>
-          <p:cNvPr id="8" name="TextBox 7"/>
+              <a:t>2 Q&amp;A</a:t>
+            </a:r>
+          </a:p>
+        </p:txBody>
+      </p:sp>
+      <p:sp>
+        <p:nvSpPr>
+          <p:cNvPr id="31" name="TextBox 30"/>
           <p:cNvSpPr txBox="1"/>
           <p:nvPr/>
         </p:nvSpPr>
         <p:spPr>
           <a:xfrm>
-            <a:off x="566928" y="1618488"/>
-            <a:ext cx="1553413" cy="1325879"/>
+            <a:off x="2448001" y="5175504"/>
+            <a:ext cx="1597609" cy="530352"/>
           </a:xfrm>
           <a:prstGeom prst="rect">
             <a:avLst/>
@@ -4715,35 +4647,35 @@
           <a:p>
             <a:pPr algn="l">
               <a:lnSpc>
-                <a:spcPct val="100000"/>
+                <a:spcPct val="105000"/>
               </a:lnSpc>
             </a:pPr>
             <a:r>
-              <a:rPr sz="1050" b="0" i="0">
+              <a:rPr sz="900" b="0" i="0">
                 <a:solidFill>
                   <a:srgbClr val="1B2340"/>
                 </a:solidFill>
                 <a:latin typeface="Calibri"/>
               </a:rPr>
-              <a:t>PM enters project, roles, tech stack, dev/test env, duration, extra prompts</a:t>
-            </a:r>
-          </a:p>
-        </p:txBody>
-      </p:sp>
-      <p:sp>
-        <p:nvSpPr>
-          <p:cNvPr id="9" name="Rounded Rectangle 8"/>
+              <a:t>Giver &amp; taker answer independently across 12 KT angles</a:t>
+            </a:r>
+          </a:p>
+        </p:txBody>
+      </p:sp>
+      <p:sp>
+        <p:nvSpPr>
+          <p:cNvPr id="32" name="Rounded Rectangle 31"/>
           <p:cNvSpPr/>
           <p:nvPr/>
         </p:nvSpPr>
         <p:spPr>
           <a:xfrm>
-            <a:off x="2358085" y="1115568"/>
-            <a:ext cx="1772869" cy="1874519"/>
+            <a:off x="4255922" y="4828032"/>
+            <a:ext cx="1780489" cy="914400"/>
           </a:xfrm>
           <a:prstGeom prst="roundRect">
             <a:avLst>
-              <a:gd name="adj" fmla="val 5000"/>
+              <a:gd name="adj" fmla="val 6000"/>
             </a:avLst>
           </a:prstGeom>
           <a:solidFill>
@@ -4778,14 +4710,14 @@
       </p:sp>
       <p:sp>
         <p:nvSpPr>
-          <p:cNvPr id="10" name="Rectangle 9"/>
+          <p:cNvPr id="33" name="Rectangle 32"/>
           <p:cNvSpPr/>
           <p:nvPr/>
         </p:nvSpPr>
         <p:spPr>
           <a:xfrm>
-            <a:off x="2358085" y="1115568"/>
-            <a:ext cx="1772869" cy="384048"/>
+            <a:off x="4255922" y="4828032"/>
+            <a:ext cx="1780489" cy="292608"/>
           </a:xfrm>
           <a:prstGeom prst="rect">
             <a:avLst/>
@@ -4822,14 +4754,14 @@
       </p:sp>
       <p:sp>
         <p:nvSpPr>
-          <p:cNvPr id="11" name="TextBox 10"/>
+          <p:cNvPr id="34" name="TextBox 33"/>
           <p:cNvSpPr txBox="1"/>
           <p:nvPr/>
         </p:nvSpPr>
         <p:spPr>
           <a:xfrm>
-            <a:off x="2467813" y="1152144"/>
-            <a:ext cx="1589989" cy="310896"/>
+            <a:off x="4347362" y="4846320"/>
+            <a:ext cx="1634185" cy="256032"/>
           </a:xfrm>
           <a:prstGeom prst="rect">
             <a:avLst/>
@@ -4848,27 +4780,27 @@
               </a:lnSpc>
             </a:pPr>
             <a:r>
-              <a:rPr sz="1300" b="1" i="0">
+              <a:rPr sz="1150" b="1" i="0">
                 <a:solidFill>
                   <a:srgbClr val="FFFFFF"/>
                 </a:solidFill>
                 <a:latin typeface="Calibri"/>
               </a:rPr>
-              <a:t>2 Q&amp;A</a:t>
-            </a:r>
-          </a:p>
-        </p:txBody>
-      </p:sp>
-      <p:sp>
-        <p:nvSpPr>
-          <p:cNvPr id="12" name="TextBox 11"/>
+              <a:t>3 Assess</a:t>
+            </a:r>
+          </a:p>
+        </p:txBody>
+      </p:sp>
+      <p:sp>
+        <p:nvSpPr>
+          <p:cNvPr id="35" name="TextBox 34"/>
           <p:cNvSpPr txBox="1"/>
           <p:nvPr/>
         </p:nvSpPr>
         <p:spPr>
           <a:xfrm>
-            <a:off x="2467813" y="1618488"/>
-            <a:ext cx="1553413" cy="1325879"/>
+            <a:off x="4347362" y="5175504"/>
+            <a:ext cx="1597609" cy="530352"/>
           </a:xfrm>
           <a:prstGeom prst="rect">
             <a:avLst/>
@@ -4883,35 +4815,35 @@
           <a:p>
             <a:pPr algn="l">
               <a:lnSpc>
-                <a:spcPct val="100000"/>
+                <a:spcPct val="105000"/>
               </a:lnSpc>
             </a:pPr>
             <a:r>
-              <a:rPr sz="1050" b="0" i="0">
+              <a:rPr sz="900" b="0" i="0">
                 <a:solidFill>
                   <a:srgbClr val="1B2340"/>
                 </a:solidFill>
                 <a:latin typeface="Calibri"/>
               </a:rPr>
-              <a:t>Giver and taker answer separately. Round 1: 12 angles. Round 2: follow-ups on weak angles</a:t>
-            </a:r>
-          </a:p>
-        </p:txBody>
-      </p:sp>
-      <p:sp>
-        <p:nvSpPr>
-          <p:cNvPr id="13" name="Rounded Rectangle 12"/>
+              <a:t>AI compares both sides; quotes verified in code</a:t>
+            </a:r>
+          </a:p>
+        </p:txBody>
+      </p:sp>
+      <p:sp>
+        <p:nvSpPr>
+          <p:cNvPr id="36" name="Rounded Rectangle 35"/>
           <p:cNvSpPr/>
           <p:nvPr/>
         </p:nvSpPr>
         <p:spPr>
           <a:xfrm>
-            <a:off x="4258970" y="1115568"/>
-            <a:ext cx="1772869" cy="1874519"/>
+            <a:off x="6155283" y="4828032"/>
+            <a:ext cx="1780489" cy="914400"/>
           </a:xfrm>
           <a:prstGeom prst="roundRect">
             <a:avLst>
-              <a:gd name="adj" fmla="val 5000"/>
+              <a:gd name="adj" fmla="val 6000"/>
             </a:avLst>
           </a:prstGeom>
           <a:solidFill>
@@ -4946,14 +4878,14 @@
       </p:sp>
       <p:sp>
         <p:nvSpPr>
-          <p:cNvPr id="14" name="Rectangle 13"/>
+          <p:cNvPr id="37" name="Rectangle 36"/>
           <p:cNvSpPr/>
           <p:nvPr/>
         </p:nvSpPr>
         <p:spPr>
           <a:xfrm>
-            <a:off x="4258970" y="1115568"/>
-            <a:ext cx="1772869" cy="384048"/>
+            <a:off x="6155283" y="4828032"/>
+            <a:ext cx="1780489" cy="292608"/>
           </a:xfrm>
           <a:prstGeom prst="rect">
             <a:avLst/>
@@ -4990,14 +4922,14 @@
       </p:sp>
       <p:sp>
         <p:nvSpPr>
-          <p:cNvPr id="15" name="TextBox 14"/>
+          <p:cNvPr id="38" name="TextBox 37"/>
           <p:cNvSpPr txBox="1"/>
           <p:nvPr/>
         </p:nvSpPr>
         <p:spPr>
           <a:xfrm>
-            <a:off x="4368698" y="1152144"/>
-            <a:ext cx="1589989" cy="310896"/>
+            <a:off x="6246723" y="4846320"/>
+            <a:ext cx="1634185" cy="256032"/>
           </a:xfrm>
           <a:prstGeom prst="rect">
             <a:avLst/>
@@ -5016,27 +4948,27 @@
               </a:lnSpc>
             </a:pPr>
             <a:r>
-              <a:rPr sz="1300" b="1" i="0">
+              <a:rPr sz="1150" b="1" i="0">
                 <a:solidFill>
                   <a:srgbClr val="FFFFFF"/>
                 </a:solidFill>
                 <a:latin typeface="Calibri"/>
               </a:rPr>
-              <a:t>3 Assess</a:t>
-            </a:r>
-          </a:p>
-        </p:txBody>
-      </p:sp>
-      <p:sp>
-        <p:nvSpPr>
-          <p:cNvPr id="16" name="TextBox 15"/>
+              <a:t>4 Actions</a:t>
+            </a:r>
+          </a:p>
+        </p:txBody>
+      </p:sp>
+      <p:sp>
+        <p:nvSpPr>
+          <p:cNvPr id="39" name="TextBox 38"/>
           <p:cNvSpPr txBox="1"/>
           <p:nvPr/>
         </p:nvSpPr>
         <p:spPr>
           <a:xfrm>
-            <a:off x="4368698" y="1618488"/>
-            <a:ext cx="1553413" cy="1325879"/>
+            <a:off x="6246723" y="5175504"/>
+            <a:ext cx="1597609" cy="530352"/>
           </a:xfrm>
           <a:prstGeom prst="rect">
             <a:avLst/>
@@ -5051,35 +4983,35 @@
           <a:p>
             <a:pPr algn="l">
               <a:lnSpc>
-                <a:spcPct val="100000"/>
+                <a:spcPct val="105000"/>
               </a:lnSpc>
             </a:pPr>
             <a:r>
-              <a:rPr sz="1050" b="0" i="0">
+              <a:rPr sz="900" b="0" i="0">
                 <a:solidFill>
                   <a:srgbClr val="1B2340"/>
                 </a:solidFill>
                 <a:latin typeface="Calibri"/>
               </a:rPr>
-              <a:t>AI compares both sides per angle; quotes verified in code; readiness scored</a:t>
-            </a:r>
-          </a:p>
-        </p:txBody>
-      </p:sp>
-      <p:sp>
-        <p:nvSpPr>
-          <p:cNvPr id="17" name="Rounded Rectangle 16"/>
+              <a:t>Gaps become owned action items, with proof or justification</a:t>
+            </a:r>
+          </a:p>
+        </p:txBody>
+      </p:sp>
+      <p:sp>
+        <p:nvSpPr>
+          <p:cNvPr id="40" name="Rounded Rectangle 39"/>
           <p:cNvSpPr/>
           <p:nvPr/>
         </p:nvSpPr>
         <p:spPr>
           <a:xfrm>
-            <a:off x="6159855" y="1115568"/>
-            <a:ext cx="1772869" cy="1874519"/>
+            <a:off x="8054644" y="4828032"/>
+            <a:ext cx="1780489" cy="914400"/>
           </a:xfrm>
           <a:prstGeom prst="roundRect">
             <a:avLst>
-              <a:gd name="adj" fmla="val 5000"/>
+              <a:gd name="adj" fmla="val 6000"/>
             </a:avLst>
           </a:prstGeom>
           <a:solidFill>
@@ -5114,14 +5046,14 @@
       </p:sp>
       <p:sp>
         <p:nvSpPr>
-          <p:cNvPr id="18" name="Rectangle 17"/>
+          <p:cNvPr id="41" name="Rectangle 40"/>
           <p:cNvSpPr/>
           <p:nvPr/>
         </p:nvSpPr>
         <p:spPr>
           <a:xfrm>
-            <a:off x="6159855" y="1115568"/>
-            <a:ext cx="1772869" cy="384048"/>
+            <a:off x="8054644" y="4828032"/>
+            <a:ext cx="1780489" cy="292608"/>
           </a:xfrm>
           <a:prstGeom prst="rect">
             <a:avLst/>
@@ -5158,14 +5090,14 @@
       </p:sp>
       <p:sp>
         <p:nvSpPr>
-          <p:cNvPr id="19" name="TextBox 18"/>
+          <p:cNvPr id="42" name="TextBox 41"/>
           <p:cNvSpPr txBox="1"/>
           <p:nvPr/>
         </p:nvSpPr>
         <p:spPr>
           <a:xfrm>
-            <a:off x="6269583" y="1152144"/>
-            <a:ext cx="1589989" cy="310896"/>
+            <a:off x="8146084" y="4846320"/>
+            <a:ext cx="1634185" cy="256032"/>
           </a:xfrm>
           <a:prstGeom prst="rect">
             <a:avLst/>
@@ -5184,27 +5116,27 @@
               </a:lnSpc>
             </a:pPr>
             <a:r>
-              <a:rPr sz="1300" b="1" i="0">
+              <a:rPr sz="1150" b="1" i="0">
                 <a:solidFill>
                   <a:srgbClr val="FFFFFF"/>
                 </a:solidFill>
                 <a:latin typeface="Calibri"/>
               </a:rPr>
-              <a:t>4 Actions</a:t>
-            </a:r>
-          </a:p>
-        </p:txBody>
-      </p:sp>
-      <p:sp>
-        <p:nvSpPr>
-          <p:cNvPr id="20" name="TextBox 19"/>
+              <a:t>5 Review</a:t>
+            </a:r>
+          </a:p>
+        </p:txBody>
+      </p:sp>
+      <p:sp>
+        <p:nvSpPr>
+          <p:cNvPr id="43" name="TextBox 42"/>
           <p:cNvSpPr txBox="1"/>
           <p:nvPr/>
         </p:nvSpPr>
         <p:spPr>
           <a:xfrm>
-            <a:off x="6269583" y="1618488"/>
-            <a:ext cx="1553413" cy="1325879"/>
+            <a:off x="8146084" y="5175504"/>
+            <a:ext cx="1597609" cy="530352"/>
           </a:xfrm>
           <a:prstGeom prst="rect">
             <a:avLst/>
@@ -5219,35 +5151,35 @@
           <a:p>
             <a:pPr algn="l">
               <a:lnSpc>
-                <a:spcPct val="100000"/>
+                <a:spcPct val="105000"/>
               </a:lnSpc>
             </a:pPr>
             <a:r>
-              <a:rPr sz="1050" b="0" i="0">
+              <a:rPr sz="900" b="0" i="0">
                 <a:solidFill>
                   <a:srgbClr val="1B2340"/>
                 </a:solidFill>
                 <a:latin typeface="Calibri"/>
               </a:rPr>
-              <a:t>Gaps become action items for giver or taker; each replies with proof or a justification to ignore</a:t>
-            </a:r>
-          </a:p>
-        </p:txBody>
-      </p:sp>
-      <p:sp>
-        <p:nvSpPr>
-          <p:cNvPr id="21" name="Rounded Rectangle 20"/>
+              <a:t>AI reviews responses; weak justifications rejected</a:t>
+            </a:r>
+          </a:p>
+        </p:txBody>
+      </p:sp>
+      <p:sp>
+        <p:nvSpPr>
+          <p:cNvPr id="44" name="Rounded Rectangle 43"/>
           <p:cNvSpPr/>
           <p:nvPr/>
         </p:nvSpPr>
         <p:spPr>
           <a:xfrm>
-            <a:off x="8060740" y="1115568"/>
-            <a:ext cx="1772869" cy="1874519"/>
+            <a:off x="9954006" y="4828032"/>
+            <a:ext cx="1780489" cy="914400"/>
           </a:xfrm>
           <a:prstGeom prst="roundRect">
             <a:avLst>
-              <a:gd name="adj" fmla="val 5000"/>
+              <a:gd name="adj" fmla="val 6000"/>
             </a:avLst>
           </a:prstGeom>
           <a:solidFill>
@@ -5282,182 +5214,14 @@
       </p:sp>
       <p:sp>
         <p:nvSpPr>
-          <p:cNvPr id="22" name="Rectangle 21"/>
+          <p:cNvPr id="45" name="Rectangle 44"/>
           <p:cNvSpPr/>
           <p:nvPr/>
         </p:nvSpPr>
         <p:spPr>
           <a:xfrm>
-            <a:off x="8060740" y="1115568"/>
-            <a:ext cx="1772869" cy="384048"/>
-          </a:xfrm>
-          <a:prstGeom prst="rect">
-            <a:avLst/>
-          </a:prstGeom>
-          <a:solidFill>
-            <a:srgbClr val="1B2340"/>
-          </a:solidFill>
-          <a:ln>
-            <a:noFill/>
-          </a:ln>
-          <a:effectLst/>
-        </p:spPr>
-        <p:style>
-          <a:lnRef idx="1">
-            <a:schemeClr val="accent1"/>
-          </a:lnRef>
-          <a:fillRef idx="3">
-            <a:schemeClr val="accent1"/>
-          </a:fillRef>
-          <a:effectRef idx="2">
-            <a:schemeClr val="accent1"/>
-          </a:effectRef>
-          <a:fontRef idx="minor">
-            <a:schemeClr val="lt1"/>
-          </a:fontRef>
-        </p:style>
-        <p:txBody>
-          <a:bodyPr rtlCol="0" anchor="ctr"/>
-          <a:lstStyle/>
-          <a:p>
-            <a:pPr algn="ctr"/>
-          </a:p>
-        </p:txBody>
-      </p:sp>
-      <p:sp>
-        <p:nvSpPr>
-          <p:cNvPr id="23" name="TextBox 22"/>
-          <p:cNvSpPr txBox="1"/>
-          <p:nvPr/>
-        </p:nvSpPr>
-        <p:spPr>
-          <a:xfrm>
-            <a:off x="8170468" y="1152144"/>
-            <a:ext cx="1589989" cy="310896"/>
-          </a:xfrm>
-          <a:prstGeom prst="rect">
-            <a:avLst/>
-          </a:prstGeom>
-          <a:noFill/>
-        </p:spPr>
-        <p:txBody>
-          <a:bodyPr wrap="square" anchor="ctr" lIns="0" rIns="0" tIns="0" bIns="0">
-            <a:spAutoFit/>
-          </a:bodyPr>
-          <a:lstStyle/>
-          <a:p>
-            <a:pPr algn="l">
-              <a:lnSpc>
-                <a:spcPct val="100000"/>
-              </a:lnSpc>
-            </a:pPr>
-            <a:r>
-              <a:rPr sz="1300" b="1" i="0">
-                <a:solidFill>
-                  <a:srgbClr val="FFFFFF"/>
-                </a:solidFill>
-                <a:latin typeface="Calibri"/>
-              </a:rPr>
-              <a:t>5 Review</a:t>
-            </a:r>
-          </a:p>
-        </p:txBody>
-      </p:sp>
-      <p:sp>
-        <p:nvSpPr>
-          <p:cNvPr id="24" name="TextBox 23"/>
-          <p:cNvSpPr txBox="1"/>
-          <p:nvPr/>
-        </p:nvSpPr>
-        <p:spPr>
-          <a:xfrm>
-            <a:off x="8170468" y="1618488"/>
-            <a:ext cx="1553413" cy="1325879"/>
-          </a:xfrm>
-          <a:prstGeom prst="rect">
-            <a:avLst/>
-          </a:prstGeom>
-          <a:noFill/>
-        </p:spPr>
-        <p:txBody>
-          <a:bodyPr wrap="square" anchor="t" lIns="0" rIns="0" tIns="0" bIns="0">
-            <a:spAutoFit/>
-          </a:bodyPr>
-          <a:lstStyle/>
-          <a:p>
-            <a:pPr algn="l">
-              <a:lnSpc>
-                <a:spcPct val="100000"/>
-              </a:lnSpc>
-            </a:pPr>
-            <a:r>
-              <a:rPr sz="1050" b="0" i="0">
-                <a:solidFill>
-                  <a:srgbClr val="1B2340"/>
-                </a:solidFill>
-                <a:latin typeface="Calibri"/>
-              </a:rPr>
-              <a:t>AI reviews responses; vague or weak justifications are rejected with a reason</a:t>
-            </a:r>
-          </a:p>
-        </p:txBody>
-      </p:sp>
-      <p:sp>
-        <p:nvSpPr>
-          <p:cNvPr id="25" name="Rounded Rectangle 24"/>
-          <p:cNvSpPr/>
-          <p:nvPr/>
-        </p:nvSpPr>
-        <p:spPr>
-          <a:xfrm>
-            <a:off x="9961626" y="1115568"/>
-            <a:ext cx="1772869" cy="1874519"/>
-          </a:xfrm>
-          <a:prstGeom prst="roundRect">
-            <a:avLst>
-              <a:gd name="adj" fmla="val 5000"/>
-            </a:avLst>
-          </a:prstGeom>
-          <a:solidFill>
-            <a:srgbClr val="EDF1F8"/>
-          </a:solidFill>
-          <a:ln>
-            <a:noFill/>
-          </a:ln>
-          <a:effectLst/>
-        </p:spPr>
-        <p:style>
-          <a:lnRef idx="1">
-            <a:schemeClr val="accent1"/>
-          </a:lnRef>
-          <a:fillRef idx="3">
-            <a:schemeClr val="accent1"/>
-          </a:fillRef>
-          <a:effectRef idx="2">
-            <a:schemeClr val="accent1"/>
-          </a:effectRef>
-          <a:fontRef idx="minor">
-            <a:schemeClr val="lt1"/>
-          </a:fontRef>
-        </p:style>
-        <p:txBody>
-          <a:bodyPr rtlCol="0" anchor="ctr"/>
-          <a:lstStyle/>
-          <a:p>
-            <a:pPr algn="ctr"/>
-          </a:p>
-        </p:txBody>
-      </p:sp>
-      <p:sp>
-        <p:nvSpPr>
-          <p:cNvPr id="26" name="Rectangle 25"/>
-          <p:cNvSpPr/>
-          <p:nvPr/>
-        </p:nvSpPr>
-        <p:spPr>
-          <a:xfrm>
-            <a:off x="9961626" y="1115568"/>
-            <a:ext cx="1772869" cy="384048"/>
+            <a:off x="9954006" y="4828032"/>
+            <a:ext cx="1780489" cy="292608"/>
           </a:xfrm>
           <a:prstGeom prst="rect">
             <a:avLst/>
@@ -5494,14 +5258,14 @@
       </p:sp>
       <p:sp>
         <p:nvSpPr>
-          <p:cNvPr id="27" name="TextBox 26"/>
+          <p:cNvPr id="46" name="TextBox 45"/>
           <p:cNvSpPr txBox="1"/>
           <p:nvPr/>
         </p:nvSpPr>
         <p:spPr>
           <a:xfrm>
-            <a:off x="10071354" y="1152144"/>
-            <a:ext cx="1589989" cy="310896"/>
+            <a:off x="10045446" y="4846320"/>
+            <a:ext cx="1634185" cy="256032"/>
           </a:xfrm>
           <a:prstGeom prst="rect">
             <a:avLst/>
@@ -5520,7 +5284,7 @@
               </a:lnSpc>
             </a:pPr>
             <a:r>
-              <a:rPr sz="1300" b="1" i="0">
+              <a:rPr sz="1150" b="1" i="0">
                 <a:solidFill>
                   <a:srgbClr val="1B2340"/>
                 </a:solidFill>
@@ -5533,14 +5297,14 @@
       </p:sp>
       <p:sp>
         <p:nvSpPr>
-          <p:cNvPr id="28" name="TextBox 27"/>
+          <p:cNvPr id="47" name="TextBox 46"/>
           <p:cNvSpPr txBox="1"/>
           <p:nvPr/>
         </p:nvSpPr>
         <p:spPr>
           <a:xfrm>
-            <a:off x="10071354" y="1618488"/>
-            <a:ext cx="1553413" cy="1325879"/>
+            <a:off x="10045446" y="5175504"/>
+            <a:ext cx="1597609" cy="530352"/>
           </a:xfrm>
           <a:prstGeom prst="rect">
             <a:avLst/>
@@ -5555,31 +5319,31 @@
           <a:p>
             <a:pPr algn="l">
               <a:lnSpc>
-                <a:spcPct val="100000"/>
+                <a:spcPct val="105000"/>
               </a:lnSpc>
             </a:pPr>
             <a:r>
-              <a:rPr sz="1050" b="0" i="0">
+              <a:rPr sz="900" b="0" i="0">
                 <a:solidFill>
                   <a:srgbClr val="1B2340"/>
                 </a:solidFill>
                 <a:latin typeface="Calibri"/>
               </a:rPr>
-              <a:t>Code rule: Close, keep open for one redress round, or Escalate to manager</a:t>
-            </a:r>
-          </a:p>
-        </p:txBody>
-      </p:sp>
-      <p:sp>
-        <p:nvSpPr>
-          <p:cNvPr id="29" name="TextBox 28"/>
+              <a:t>Code: Close, one redress round, or Escalate</a:t>
+            </a:r>
+          </a:p>
+        </p:txBody>
+      </p:sp>
+      <p:sp>
+        <p:nvSpPr>
+          <p:cNvPr id="48" name="TextBox 47"/>
           <p:cNvSpPr txBox="1"/>
           <p:nvPr/>
         </p:nvSpPr>
         <p:spPr>
           <a:xfrm>
-            <a:off x="457200" y="3044951"/>
-            <a:ext cx="11277295" cy="256032"/>
+            <a:off x="457200" y="5769864"/>
+            <a:ext cx="11277295" cy="201168"/>
           </a:xfrm>
           <a:prstGeom prst="rect">
             <a:avLst/>
@@ -5598,686 +5362,26 @@
               </a:lnSpc>
             </a:pPr>
             <a:r>
-              <a:rPr sz="1050" b="0" i="1">
+              <a:rPr sz="950" b="0" i="1">
                 <a:solidFill>
                   <a:srgbClr val="555F75"/>
                 </a:solidFill>
                 <a:latin typeface="Calibri"/>
               </a:rPr>
-              <a:t>Redress loop: unresolved items return to their owner once, with the reviewer's note. Still unresolved: escalated.</a:t>
-            </a:r>
-          </a:p>
-        </p:txBody>
-      </p:sp>
-      <p:sp>
-        <p:nvSpPr>
-          <p:cNvPr id="30" name="Rounded Rectangle 29"/>
-          <p:cNvSpPr/>
-          <p:nvPr/>
-        </p:nvSpPr>
-        <p:spPr>
-          <a:xfrm>
-            <a:off x="457200" y="3401568"/>
-            <a:ext cx="3637178" cy="2788920"/>
-          </a:xfrm>
-          <a:prstGeom prst="roundRect">
-            <a:avLst>
-              <a:gd name="adj" fmla="val 4000"/>
-            </a:avLst>
-          </a:prstGeom>
-          <a:solidFill>
-            <a:srgbClr val="EDF1F8"/>
-          </a:solidFill>
-          <a:ln>
-            <a:noFill/>
-          </a:ln>
-          <a:effectLst/>
-        </p:spPr>
-        <p:style>
-          <a:lnRef idx="1">
-            <a:schemeClr val="accent1"/>
-          </a:lnRef>
-          <a:fillRef idx="3">
-            <a:schemeClr val="accent1"/>
-          </a:fillRef>
-          <a:effectRef idx="2">
-            <a:schemeClr val="accent1"/>
-          </a:effectRef>
-          <a:fontRef idx="minor">
-            <a:schemeClr val="lt1"/>
-          </a:fontRef>
-        </p:style>
-        <p:txBody>
-          <a:bodyPr rtlCol="0" anchor="ctr"/>
-          <a:lstStyle/>
-          <a:p>
-            <a:pPr algn="ctr"/>
-          </a:p>
-        </p:txBody>
-      </p:sp>
-      <p:sp>
-        <p:nvSpPr>
-          <p:cNvPr id="31" name="TextBox 30"/>
+              <a:t>Redress loop: a rejected item returns to its owner once, with the reviewer's note. Still unresolved: escalated to the manager.</a:t>
+            </a:r>
+          </a:p>
+        </p:txBody>
+      </p:sp>
+      <p:sp>
+        <p:nvSpPr>
+          <p:cNvPr id="49" name="TextBox 48"/>
           <p:cNvSpPr txBox="1"/>
           <p:nvPr/>
         </p:nvSpPr>
         <p:spPr>
           <a:xfrm>
-            <a:off x="640080" y="3511296"/>
-            <a:ext cx="3271418" cy="310896"/>
-          </a:xfrm>
-          <a:prstGeom prst="rect">
-            <a:avLst/>
-          </a:prstGeom>
-          <a:noFill/>
-        </p:spPr>
-        <p:txBody>
-          <a:bodyPr wrap="square" anchor="t" lIns="0" rIns="0" tIns="0" bIns="0">
-            <a:spAutoFit/>
-          </a:bodyPr>
-          <a:lstStyle/>
-          <a:p>
-            <a:pPr algn="l">
-              <a:lnSpc>
-                <a:spcPct val="100000"/>
-              </a:lnSpc>
-            </a:pPr>
-            <a:r>
-              <a:rPr sz="1400" b="1" i="0">
-                <a:solidFill>
-                  <a:srgbClr val="1B2340"/>
-                </a:solidFill>
-                <a:latin typeface="Calibri"/>
-              </a:rPr>
-              <a:t>Scoring and live eval</a:t>
-            </a:r>
-          </a:p>
-        </p:txBody>
-      </p:sp>
-      <p:sp>
-        <p:nvSpPr>
-          <p:cNvPr id="32" name="TextBox 31"/>
-          <p:cNvSpPr txBox="1"/>
-          <p:nvPr/>
-        </p:nvSpPr>
-        <p:spPr>
-          <a:xfrm>
-            <a:off x="640080" y="3904488"/>
-            <a:ext cx="3271418" cy="2194560"/>
-          </a:xfrm>
-          <a:prstGeom prst="rect">
-            <a:avLst/>
-          </a:prstGeom>
-          <a:noFill/>
-        </p:spPr>
-        <p:txBody>
-          <a:bodyPr wrap="square" lIns="0" rIns="0" tIns="0" bIns="0">
-            <a:spAutoFit/>
-          </a:bodyPr>
-          <a:lstStyle/>
-          <a:p>
-            <a:pPr algn="l">
-              <a:lnSpc>
-                <a:spcPct val="108000"/>
-              </a:lnSpc>
-              <a:spcAft>
-                <a:spcPts val="400"/>
-              </a:spcAft>
-            </a:pPr>
-            <a:r>
-              <a:rPr sz="850" b="1">
-                <a:solidFill>
-                  <a:srgbClr val="F2A93B"/>
-                </a:solidFill>
-                <a:latin typeface="Calibri"/>
-              </a:rPr>
-              <a:t>●  </a:t>
-            </a:r>
-            <a:r>
-              <a:rPr sz="1050">
-                <a:solidFill>
-                  <a:srgbClr val="1B2340"/>
-                </a:solidFill>
-                <a:latin typeface="Calibri"/>
-              </a:rPr>
-              <a:t>Readiness = weighted share of 12 angles: architecture, environments, CI/CD, incidents, security, in-flight work and more</a:t>
-            </a:r>
-          </a:p>
-          <a:p>
-            <a:pPr algn="l">
-              <a:lnSpc>
-                <a:spcPct val="108000"/>
-              </a:lnSpc>
-              <a:spcAft>
-                <a:spcPts val="400"/>
-              </a:spcAft>
-            </a:pPr>
-            <a:r>
-              <a:rPr sz="850" b="1">
-                <a:solidFill>
-                  <a:srgbClr val="F2A93B"/>
-                </a:solidFill>
-                <a:latin typeface="Calibri"/>
-              </a:rPr>
-              <a:t>●  </a:t>
-            </a:r>
-            <a:r>
-              <a:rPr sz="1050">
-                <a:solidFill>
-                  <a:srgbClr val="1B2340"/>
-                </a:solidFill>
-                <a:latin typeface="Calibri"/>
-              </a:rPr>
-              <a:t>Covered only if both sides give verifiable quotes and the taker's answer matches the giver's</a:t>
-            </a:r>
-          </a:p>
-          <a:p>
-            <a:pPr algn="l">
-              <a:lnSpc>
-                <a:spcPct val="108000"/>
-              </a:lnSpc>
-              <a:spcAft>
-                <a:spcPts val="400"/>
-              </a:spcAft>
-            </a:pPr>
-            <a:r>
-              <a:rPr sz="850" b="1">
-                <a:solidFill>
-                  <a:srgbClr val="F2A93B"/>
-                </a:solidFill>
-                <a:latin typeface="Calibri"/>
-              </a:rPr>
-              <a:t>●  </a:t>
-            </a:r>
-            <a:r>
-              <a:rPr sz="1050">
-                <a:solidFill>
-                  <a:srgbClr val="1B2340"/>
-                </a:solidFill>
-                <a:latin typeface="Calibri"/>
-              </a:rPr>
-              <a:t>Close needs every action accepted and readiness at or above the manager's target (default 80%)</a:t>
-            </a:r>
-          </a:p>
-          <a:p>
-            <a:pPr algn="l">
-              <a:lnSpc>
-                <a:spcPct val="108000"/>
-              </a:lnSpc>
-              <a:spcAft>
-                <a:spcPts val="400"/>
-              </a:spcAft>
-            </a:pPr>
-            <a:r>
-              <a:rPr sz="850" b="1">
-                <a:solidFill>
-                  <a:srgbClr val="F2A93B"/>
-                </a:solidFill>
-                <a:latin typeface="Calibri"/>
-              </a:rPr>
-              <a:t>●  </a:t>
-            </a:r>
-            <a:r>
-              <a:rPr sz="1050">
-                <a:solidFill>
-                  <a:srgbClr val="1B2340"/>
-                </a:solidFill>
-                <a:latin typeface="Calibri"/>
-              </a:rPr>
-              <a:t>Live readiness trail: 57% → 66% → 95% → 97%; closed after 1 redress round</a:t>
-            </a:r>
-          </a:p>
-        </p:txBody>
-      </p:sp>
-      <p:sp>
-        <p:nvSpPr>
-          <p:cNvPr id="33" name="Rounded Rectangle 32"/>
-          <p:cNvSpPr/>
-          <p:nvPr/>
-        </p:nvSpPr>
-        <p:spPr>
-          <a:xfrm>
-            <a:off x="4277258" y="3401568"/>
-            <a:ext cx="3637178" cy="2788920"/>
-          </a:xfrm>
-          <a:prstGeom prst="roundRect">
-            <a:avLst>
-              <a:gd name="adj" fmla="val 4000"/>
-            </a:avLst>
-          </a:prstGeom>
-          <a:solidFill>
-            <a:srgbClr val="EDF1F8"/>
-          </a:solidFill>
-          <a:ln>
-            <a:noFill/>
-          </a:ln>
-          <a:effectLst/>
-        </p:spPr>
-        <p:style>
-          <a:lnRef idx="1">
-            <a:schemeClr val="accent1"/>
-          </a:lnRef>
-          <a:fillRef idx="3">
-            <a:schemeClr val="accent1"/>
-          </a:fillRef>
-          <a:effectRef idx="2">
-            <a:schemeClr val="accent1"/>
-          </a:effectRef>
-          <a:fontRef idx="minor">
-            <a:schemeClr val="lt1"/>
-          </a:fontRef>
-        </p:style>
-        <p:txBody>
-          <a:bodyPr rtlCol="0" anchor="ctr"/>
-          <a:lstStyle/>
-          <a:p>
-            <a:pPr algn="ctr"/>
-          </a:p>
-        </p:txBody>
-      </p:sp>
-      <p:sp>
-        <p:nvSpPr>
-          <p:cNvPr id="34" name="TextBox 33"/>
-          <p:cNvSpPr txBox="1"/>
-          <p:nvPr/>
-        </p:nvSpPr>
-        <p:spPr>
-          <a:xfrm>
-            <a:off x="4460138" y="3511296"/>
-            <a:ext cx="3271418" cy="310896"/>
-          </a:xfrm>
-          <a:prstGeom prst="rect">
-            <a:avLst/>
-          </a:prstGeom>
-          <a:noFill/>
-        </p:spPr>
-        <p:txBody>
-          <a:bodyPr wrap="square" anchor="t" lIns="0" rIns="0" tIns="0" bIns="0">
-            <a:spAutoFit/>
-          </a:bodyPr>
-          <a:lstStyle/>
-          <a:p>
-            <a:pPr algn="l">
-              <a:lnSpc>
-                <a:spcPct val="100000"/>
-              </a:lnSpc>
-            </a:pPr>
-            <a:r>
-              <a:rPr sz="1400" b="1" i="0">
-                <a:solidFill>
-                  <a:srgbClr val="1B2340"/>
-                </a:solidFill>
-                <a:latin typeface="Calibri"/>
-              </a:rPr>
-              <a:t>Manager tracker</a:t>
-            </a:r>
-          </a:p>
-        </p:txBody>
-      </p:sp>
-      <p:sp>
-        <p:nvSpPr>
-          <p:cNvPr id="35" name="TextBox 34"/>
-          <p:cNvSpPr txBox="1"/>
-          <p:nvPr/>
-        </p:nvSpPr>
-        <p:spPr>
-          <a:xfrm>
-            <a:off x="4460138" y="3904488"/>
-            <a:ext cx="3271418" cy="2194560"/>
-          </a:xfrm>
-          <a:prstGeom prst="rect">
-            <a:avLst/>
-          </a:prstGeom>
-          <a:noFill/>
-        </p:spPr>
-        <p:txBody>
-          <a:bodyPr wrap="square" lIns="0" rIns="0" tIns="0" bIns="0">
-            <a:spAutoFit/>
-          </a:bodyPr>
-          <a:lstStyle/>
-          <a:p>
-            <a:pPr algn="l">
-              <a:lnSpc>
-                <a:spcPct val="108000"/>
-              </a:lnSpc>
-              <a:spcAft>
-                <a:spcPts val="400"/>
-              </a:spcAft>
-            </a:pPr>
-            <a:r>
-              <a:rPr sz="850" b="1">
-                <a:solidFill>
-                  <a:srgbClr val="F2A93B"/>
-                </a:solidFill>
-                <a:latin typeface="Calibri"/>
-              </a:rPr>
-              <a:t>●  </a:t>
-            </a:r>
-            <a:r>
-              <a:rPr sz="1050">
-                <a:solidFill>
-                  <a:srgbClr val="1B2340"/>
-                </a:solidFill>
-                <a:latin typeface="Calibri"/>
-              </a:rPr>
-              <a:t>Every KT: stage, day n of N, deadline, days left, overdue flag</a:t>
-            </a:r>
-          </a:p>
-          <a:p>
-            <a:pPr algn="l">
-              <a:lnSpc>
-                <a:spcPct val="108000"/>
-              </a:lnSpc>
-              <a:spcAft>
-                <a:spcPts val="400"/>
-              </a:spcAft>
-            </a:pPr>
-            <a:r>
-              <a:rPr sz="850" b="1">
-                <a:solidFill>
-                  <a:srgbClr val="F2A93B"/>
-                </a:solidFill>
-                <a:latin typeface="Calibri"/>
-              </a:rPr>
-              <a:t>●  </a:t>
-            </a:r>
-            <a:r>
-              <a:rPr sz="1050">
-                <a:solidFill>
-                  <a:srgbClr val="1B2340"/>
-                </a:solidFill>
-                <a:latin typeface="Calibri"/>
-              </a:rPr>
-              <a:t>Who each KT is waiting on: giver, taker or manager</a:t>
-            </a:r>
-          </a:p>
-          <a:p>
-            <a:pPr algn="l">
-              <a:lnSpc>
-                <a:spcPct val="108000"/>
-              </a:lnSpc>
-              <a:spcAft>
-                <a:spcPts val="400"/>
-              </a:spcAft>
-            </a:pPr>
-            <a:r>
-              <a:rPr sz="850" b="1">
-                <a:solidFill>
-                  <a:srgbClr val="F2A93B"/>
-                </a:solidFill>
-                <a:latin typeface="Calibri"/>
-              </a:rPr>
-              <a:t>●  </a:t>
-            </a:r>
-            <a:r>
-              <a:rPr sz="1050">
-                <a:solidFill>
-                  <a:srgbClr val="1B2340"/>
-                </a:solidFill>
-                <a:latin typeface="Calibri"/>
-              </a:rPr>
-              <a:t>Action items across KTs with owner, severity, due date, state</a:t>
-            </a:r>
-          </a:p>
-          <a:p>
-            <a:pPr algn="l">
-              <a:lnSpc>
-                <a:spcPct val="108000"/>
-              </a:lnSpc>
-              <a:spcAft>
-                <a:spcPts val="400"/>
-              </a:spcAft>
-            </a:pPr>
-            <a:r>
-              <a:rPr sz="850" b="1">
-                <a:solidFill>
-                  <a:srgbClr val="F2A93B"/>
-                </a:solidFill>
-                <a:latin typeface="Calibri"/>
-              </a:rPr>
-              <a:t>●  </a:t>
-            </a:r>
-            <a:r>
-              <a:rPr sz="1050">
-                <a:solidFill>
-                  <a:srgbClr val="1B2340"/>
-                </a:solidFill>
-                <a:latin typeface="Calibri"/>
-              </a:rPr>
-              <a:t>Timeline of stage changes, time in stage, readiness trend, override with a note</a:t>
-            </a:r>
-          </a:p>
-        </p:txBody>
-      </p:sp>
-      <p:sp>
-        <p:nvSpPr>
-          <p:cNvPr id="36" name="Rounded Rectangle 35"/>
-          <p:cNvSpPr/>
-          <p:nvPr/>
-        </p:nvSpPr>
-        <p:spPr>
-          <a:xfrm>
-            <a:off x="8097316" y="3401568"/>
-            <a:ext cx="3637178" cy="2788920"/>
-          </a:xfrm>
-          <a:prstGeom prst="roundRect">
-            <a:avLst>
-              <a:gd name="adj" fmla="val 4000"/>
-            </a:avLst>
-          </a:prstGeom>
-          <a:solidFill>
-            <a:srgbClr val="EDF1F8"/>
-          </a:solidFill>
-          <a:ln>
-            <a:noFill/>
-          </a:ln>
-          <a:effectLst/>
-        </p:spPr>
-        <p:style>
-          <a:lnRef idx="1">
-            <a:schemeClr val="accent1"/>
-          </a:lnRef>
-          <a:fillRef idx="3">
-            <a:schemeClr val="accent1"/>
-          </a:fillRef>
-          <a:effectRef idx="2">
-            <a:schemeClr val="accent1"/>
-          </a:effectRef>
-          <a:fontRef idx="minor">
-            <a:schemeClr val="lt1"/>
-          </a:fontRef>
-        </p:style>
-        <p:txBody>
-          <a:bodyPr rtlCol="0" anchor="ctr"/>
-          <a:lstStyle/>
-          <a:p>
-            <a:pPr algn="ctr"/>
-          </a:p>
-        </p:txBody>
-      </p:sp>
-      <p:sp>
-        <p:nvSpPr>
-          <p:cNvPr id="37" name="TextBox 36"/>
-          <p:cNvSpPr txBox="1"/>
-          <p:nvPr/>
-        </p:nvSpPr>
-        <p:spPr>
-          <a:xfrm>
-            <a:off x="8280196" y="3511296"/>
-            <a:ext cx="3271418" cy="310896"/>
-          </a:xfrm>
-          <a:prstGeom prst="rect">
-            <a:avLst/>
-          </a:prstGeom>
-          <a:noFill/>
-        </p:spPr>
-        <p:txBody>
-          <a:bodyPr wrap="square" anchor="t" lIns="0" rIns="0" tIns="0" bIns="0">
-            <a:spAutoFit/>
-          </a:bodyPr>
-          <a:lstStyle/>
-          <a:p>
-            <a:pPr algn="l">
-              <a:lnSpc>
-                <a:spcPct val="100000"/>
-              </a:lnSpc>
-            </a:pPr>
-            <a:r>
-              <a:rPr sz="1400" b="1" i="0">
-                <a:solidFill>
-                  <a:srgbClr val="1B2340"/>
-                </a:solidFill>
-                <a:latin typeface="Calibri"/>
-              </a:rPr>
-              <a:t>AI, code and human</a:t>
-            </a:r>
-          </a:p>
-        </p:txBody>
-      </p:sp>
-      <p:sp>
-        <p:nvSpPr>
-          <p:cNvPr id="38" name="TextBox 37"/>
-          <p:cNvSpPr txBox="1"/>
-          <p:nvPr/>
-        </p:nvSpPr>
-        <p:spPr>
-          <a:xfrm>
-            <a:off x="8280196" y="3904488"/>
-            <a:ext cx="3271418" cy="2194560"/>
-          </a:xfrm>
-          <a:prstGeom prst="rect">
-            <a:avLst/>
-          </a:prstGeom>
-          <a:noFill/>
-        </p:spPr>
-        <p:txBody>
-          <a:bodyPr wrap="square" lIns="0" rIns="0" tIns="0" bIns="0">
-            <a:spAutoFit/>
-          </a:bodyPr>
-          <a:lstStyle/>
-          <a:p>
-            <a:pPr algn="l">
-              <a:lnSpc>
-                <a:spcPct val="108000"/>
-              </a:lnSpc>
-              <a:spcAft>
-                <a:spcPts val="400"/>
-              </a:spcAft>
-            </a:pPr>
-            <a:r>
-              <a:rPr sz="850" b="1">
-                <a:solidFill>
-                  <a:srgbClr val="F2A93B"/>
-                </a:solidFill>
-                <a:latin typeface="Calibri"/>
-              </a:rPr>
-              <a:t>●  </a:t>
-            </a:r>
-            <a:r>
-              <a:rPr sz="1050">
-                <a:solidFill>
-                  <a:srgbClr val="1B2340"/>
-                </a:solidFill>
-                <a:latin typeface="Calibri"/>
-              </a:rPr>
-              <a:t>AI: writes the questions, compares answers, recommends actions, reviews responses</a:t>
-            </a:r>
-          </a:p>
-          <a:p>
-            <a:pPr algn="l">
-              <a:lnSpc>
-                <a:spcPct val="108000"/>
-              </a:lnSpc>
-              <a:spcAft>
-                <a:spcPts val="400"/>
-              </a:spcAft>
-            </a:pPr>
-            <a:r>
-              <a:rPr sz="850" b="1">
-                <a:solidFill>
-                  <a:srgbClr val="F2A93B"/>
-                </a:solidFill>
-                <a:latin typeface="Calibri"/>
-              </a:rPr>
-              <a:t>●  </a:t>
-            </a:r>
-            <a:r>
-              <a:rPr sz="1050">
-                <a:solidFill>
-                  <a:srgbClr val="1B2340"/>
-                </a:solidFill>
-                <a:latin typeface="Calibri"/>
-              </a:rPr>
-              <a:t>Code: verifies quotes, scores readiness, applies the close / redress / escalate rule, tracks dates</a:t>
-            </a:r>
-          </a:p>
-          <a:p>
-            <a:pPr algn="l">
-              <a:lnSpc>
-                <a:spcPct val="108000"/>
-              </a:lnSpc>
-              <a:spcAft>
-                <a:spcPts val="400"/>
-              </a:spcAft>
-            </a:pPr>
-            <a:r>
-              <a:rPr sz="850" b="1">
-                <a:solidFill>
-                  <a:srgbClr val="F2A93B"/>
-                </a:solidFill>
-                <a:latin typeface="Calibri"/>
-              </a:rPr>
-              <a:t>●  </a:t>
-            </a:r>
-            <a:r>
-              <a:rPr sz="1050">
-                <a:solidFill>
-                  <a:srgbClr val="1B2340"/>
-                </a:solidFill>
-                <a:latin typeface="Calibri"/>
-              </a:rPr>
-              <a:t>Giver and taker: answer independently; act on items or justify ignoring them</a:t>
-            </a:r>
-          </a:p>
-          <a:p>
-            <a:pPr algn="l">
-              <a:lnSpc>
-                <a:spcPct val="108000"/>
-              </a:lnSpc>
-              <a:spcAft>
-                <a:spcPts val="400"/>
-              </a:spcAft>
-            </a:pPr>
-            <a:r>
-              <a:rPr sz="850" b="1">
-                <a:solidFill>
-                  <a:srgbClr val="F2A93B"/>
-                </a:solidFill>
-                <a:latin typeface="Calibri"/>
-              </a:rPr>
-              <a:t>●  </a:t>
-            </a:r>
-            <a:r>
-              <a:rPr sz="1050">
-                <a:solidFill>
-                  <a:srgbClr val="1B2340"/>
-                </a:solidFill>
-                <a:latin typeface="Calibri"/>
-              </a:rPr>
-              <a:t>Manager: sets inputs and target; owns escalations and overrides</a:t>
-            </a:r>
-          </a:p>
-        </p:txBody>
-      </p:sp>
-      <p:sp>
-        <p:nvSpPr>
-          <p:cNvPr id="39" name="TextBox 38"/>
-          <p:cNvSpPr txBox="1"/>
-          <p:nvPr/>
-        </p:nvSpPr>
-        <p:spPr>
-          <a:xfrm>
-            <a:off x="457200" y="6355080"/>
+            <a:off x="457200" y="6016752"/>
             <a:ext cx="11277295" cy="274320"/>
           </a:xfrm>
           <a:prstGeom prst="rect">
@@ -6297,13 +5401,52 @@
               </a:lnSpc>
             </a:pPr>
             <a:r>
-              <a:rPr sz="950" b="0" i="1">
+              <a:rPr sz="1000" b="0" i="1">
                 <a:solidFill>
                   <a:srgbClr val="555F75"/>
                 </a:solidFill>
                 <a:latin typeface="Calibri"/>
               </a:rPr>
-              <a:t>Eval: simulated giver and taker personas with 4 planted weak angles, one synthetic project, one run (69 s end to end). The target is a stopping rule, not proof of completeness.</a:t>
+              <a:t>Stack: Python · Streamlit · Google Gemini (structured output), Groq fallback on outage/quota · no GPU needed</a:t>
+            </a:r>
+          </a:p>
+        </p:txBody>
+      </p:sp>
+      <p:sp>
+        <p:nvSpPr>
+          <p:cNvPr id="50" name="TextBox 49"/>
+          <p:cNvSpPr txBox="1"/>
+          <p:nvPr/>
+        </p:nvSpPr>
+        <p:spPr>
+          <a:xfrm>
+            <a:off x="457200" y="6281928"/>
+            <a:ext cx="11277295" cy="274320"/>
+          </a:xfrm>
+          <a:prstGeom prst="rect">
+            <a:avLst/>
+          </a:prstGeom>
+          <a:noFill/>
+        </p:spPr>
+        <p:txBody>
+          <a:bodyPr wrap="square" anchor="t" lIns="0" rIns="0" tIns="0" bIns="0">
+            <a:spAutoFit/>
+          </a:bodyPr>
+          <a:lstStyle/>
+          <a:p>
+            <a:pPr algn="ctr">
+              <a:lnSpc>
+                <a:spcPct val="100000"/>
+              </a:lnSpc>
+            </a:pPr>
+            <a:r>
+              <a:rPr sz="900" b="0" i="1">
+                <a:solidFill>
+                  <a:srgbClr val="555F75"/>
+                </a:solidFill>
+                <a:latin typeface="Calibri"/>
+              </a:rPr>
+              <a:t>Eval: simulated giver/taker personas, 4 planted weak angles, one synthetic project, one run (69s end to end). Target is a stopping rule, not proof of completeness.</a:t>
             </a:r>
           </a:p>
         </p:txBody>
